--- a/doc/workflow.pptx
+++ b/doc/workflow.pptx
@@ -5,10 +5,11 @@
     <p:sldMasterId id="2147483648" r:id="rId1"/>
   </p:sldMasterIdLst>
   <p:notesMasterIdLst>
-    <p:notesMasterId r:id="rId3"/>
+    <p:notesMasterId r:id="rId4"/>
   </p:notesMasterIdLst>
   <p:sldIdLst>
     <p:sldId id="256" r:id="rId2"/>
+    <p:sldId id="257" r:id="rId3"/>
   </p:sldIdLst>
   <p:sldSz cx="12192000" cy="6858000"/>
   <p:notesSz cx="6858000" cy="9144000"/>
@@ -164,7 +165,7 @@
             </a:lvl1pPr>
           </a:lstStyle>
           <a:p>
-            <a:endParaRPr lang="sv-SE"/>
+            <a:endParaRPr lang="sv-SE" dirty="0"/>
           </a:p>
         </p:txBody>
       </p:sp>
@@ -197,9 +198,9 @@
           <a:p>
             <a:fld id="{33F75935-3AA1-1B46-B712-A65EB9A8E2B8}" type="datetimeFigureOut">
               <a:rPr lang="sv-SE" smtClean="0"/>
-              <a:t>2020-05-25</a:t>
+              <a:t>2020-11-18</a:t>
             </a:fld>
-            <a:endParaRPr lang="sv-SE"/>
+            <a:endParaRPr lang="sv-SE" dirty="0"/>
           </a:p>
         </p:txBody>
       </p:sp>
@@ -232,7 +233,7 @@
           <a:bodyPr vert="horz" lIns="91440" tIns="45720" rIns="91440" bIns="45720" rtlCol="0" anchor="ctr"/>
           <a:lstStyle/>
           <a:p>
-            <a:endParaRPr lang="sv-SE"/>
+            <a:endParaRPr lang="sv-SE" dirty="0"/>
           </a:p>
         </p:txBody>
       </p:sp>
@@ -323,7 +324,7 @@
             </a:lvl1pPr>
           </a:lstStyle>
           <a:p>
-            <a:endParaRPr lang="sv-SE"/>
+            <a:endParaRPr lang="sv-SE" dirty="0"/>
           </a:p>
         </p:txBody>
       </p:sp>
@@ -358,7 +359,7 @@
               <a:rPr lang="sv-SE" smtClean="0"/>
               <a:t>‹#›</a:t>
             </a:fld>
-            <a:endParaRPr lang="sv-SE"/>
+            <a:endParaRPr lang="sv-SE" dirty="0"/>
           </a:p>
         </p:txBody>
       </p:sp>
@@ -509,7 +510,7 @@
           <a:bodyPr/>
           <a:lstStyle/>
           <a:p>
-            <a:endParaRPr lang="sv-SE"/>
+            <a:endParaRPr lang="sv-SE" dirty="0"/>
           </a:p>
         </p:txBody>
       </p:sp>
@@ -532,7 +533,7 @@
               <a:rPr lang="sv-SE" smtClean="0"/>
               <a:t>1</a:t>
             </a:fld>
-            <a:endParaRPr lang="sv-SE"/>
+            <a:endParaRPr lang="sv-SE" dirty="0"/>
           </a:p>
         </p:txBody>
       </p:sp>
@@ -698,9 +699,9 @@
           <a:p>
             <a:fld id="{1CB116C7-4A20-444B-AB97-BC343238C251}" type="datetimeFigureOut">
               <a:rPr lang="sv-SE" smtClean="0"/>
-              <a:t>2020-05-25</a:t>
+              <a:t>2020-11-18</a:t>
             </a:fld>
-            <a:endParaRPr lang="sv-SE"/>
+            <a:endParaRPr lang="sv-SE" dirty="0"/>
           </a:p>
         </p:txBody>
       </p:sp>
@@ -725,7 +726,7 @@
           <a:bodyPr/>
           <a:lstStyle/>
           <a:p>
-            <a:endParaRPr lang="sv-SE"/>
+            <a:endParaRPr lang="sv-SE" dirty="0"/>
           </a:p>
         </p:txBody>
       </p:sp>
@@ -754,7 +755,7 @@
               <a:rPr lang="sv-SE" smtClean="0"/>
               <a:t>‹#›</a:t>
             </a:fld>
-            <a:endParaRPr lang="sv-SE"/>
+            <a:endParaRPr lang="sv-SE" dirty="0"/>
           </a:p>
         </p:txBody>
       </p:sp>
@@ -898,9 +899,9 @@
           <a:p>
             <a:fld id="{1CB116C7-4A20-444B-AB97-BC343238C251}" type="datetimeFigureOut">
               <a:rPr lang="sv-SE" smtClean="0"/>
-              <a:t>2020-05-25</a:t>
+              <a:t>2020-11-18</a:t>
             </a:fld>
-            <a:endParaRPr lang="sv-SE"/>
+            <a:endParaRPr lang="sv-SE" dirty="0"/>
           </a:p>
         </p:txBody>
       </p:sp>
@@ -925,7 +926,7 @@
           <a:bodyPr/>
           <a:lstStyle/>
           <a:p>
-            <a:endParaRPr lang="sv-SE"/>
+            <a:endParaRPr lang="sv-SE" dirty="0"/>
           </a:p>
         </p:txBody>
       </p:sp>
@@ -954,7 +955,7 @@
               <a:rPr lang="sv-SE" smtClean="0"/>
               <a:t>‹#›</a:t>
             </a:fld>
-            <a:endParaRPr lang="sv-SE"/>
+            <a:endParaRPr lang="sv-SE" dirty="0"/>
           </a:p>
         </p:txBody>
       </p:sp>
@@ -1108,9 +1109,9 @@
           <a:p>
             <a:fld id="{1CB116C7-4A20-444B-AB97-BC343238C251}" type="datetimeFigureOut">
               <a:rPr lang="sv-SE" smtClean="0"/>
-              <a:t>2020-05-25</a:t>
+              <a:t>2020-11-18</a:t>
             </a:fld>
-            <a:endParaRPr lang="sv-SE"/>
+            <a:endParaRPr lang="sv-SE" dirty="0"/>
           </a:p>
         </p:txBody>
       </p:sp>
@@ -1135,7 +1136,7 @@
           <a:bodyPr/>
           <a:lstStyle/>
           <a:p>
-            <a:endParaRPr lang="sv-SE"/>
+            <a:endParaRPr lang="sv-SE" dirty="0"/>
           </a:p>
         </p:txBody>
       </p:sp>
@@ -1164,7 +1165,7 @@
               <a:rPr lang="sv-SE" smtClean="0"/>
               <a:t>‹#›</a:t>
             </a:fld>
-            <a:endParaRPr lang="sv-SE"/>
+            <a:endParaRPr lang="sv-SE" dirty="0"/>
           </a:p>
         </p:txBody>
       </p:sp>
@@ -1308,9 +1309,9 @@
           <a:p>
             <a:fld id="{1CB116C7-4A20-444B-AB97-BC343238C251}" type="datetimeFigureOut">
               <a:rPr lang="sv-SE" smtClean="0"/>
-              <a:t>2020-05-25</a:t>
+              <a:t>2020-11-18</a:t>
             </a:fld>
-            <a:endParaRPr lang="sv-SE"/>
+            <a:endParaRPr lang="sv-SE" dirty="0"/>
           </a:p>
         </p:txBody>
       </p:sp>
@@ -1335,7 +1336,7 @@
           <a:bodyPr/>
           <a:lstStyle/>
           <a:p>
-            <a:endParaRPr lang="sv-SE"/>
+            <a:endParaRPr lang="sv-SE" dirty="0"/>
           </a:p>
         </p:txBody>
       </p:sp>
@@ -1364,7 +1365,7 @@
               <a:rPr lang="sv-SE" smtClean="0"/>
               <a:t>‹#›</a:t>
             </a:fld>
-            <a:endParaRPr lang="sv-SE"/>
+            <a:endParaRPr lang="sv-SE" dirty="0"/>
           </a:p>
         </p:txBody>
       </p:sp>
@@ -1584,9 +1585,9 @@
           <a:p>
             <a:fld id="{1CB116C7-4A20-444B-AB97-BC343238C251}" type="datetimeFigureOut">
               <a:rPr lang="sv-SE" smtClean="0"/>
-              <a:t>2020-05-25</a:t>
+              <a:t>2020-11-18</a:t>
             </a:fld>
-            <a:endParaRPr lang="sv-SE"/>
+            <a:endParaRPr lang="sv-SE" dirty="0"/>
           </a:p>
         </p:txBody>
       </p:sp>
@@ -1611,7 +1612,7 @@
           <a:bodyPr/>
           <a:lstStyle/>
           <a:p>
-            <a:endParaRPr lang="sv-SE"/>
+            <a:endParaRPr lang="sv-SE" dirty="0"/>
           </a:p>
         </p:txBody>
       </p:sp>
@@ -1640,7 +1641,7 @@
               <a:rPr lang="sv-SE" smtClean="0"/>
               <a:t>‹#›</a:t>
             </a:fld>
-            <a:endParaRPr lang="sv-SE"/>
+            <a:endParaRPr lang="sv-SE" dirty="0"/>
           </a:p>
         </p:txBody>
       </p:sp>
@@ -1852,9 +1853,9 @@
           <a:p>
             <a:fld id="{1CB116C7-4A20-444B-AB97-BC343238C251}" type="datetimeFigureOut">
               <a:rPr lang="sv-SE" smtClean="0"/>
-              <a:t>2020-05-25</a:t>
+              <a:t>2020-11-18</a:t>
             </a:fld>
-            <a:endParaRPr lang="sv-SE"/>
+            <a:endParaRPr lang="sv-SE" dirty="0"/>
           </a:p>
         </p:txBody>
       </p:sp>
@@ -1879,7 +1880,7 @@
           <a:bodyPr/>
           <a:lstStyle/>
           <a:p>
-            <a:endParaRPr lang="sv-SE"/>
+            <a:endParaRPr lang="sv-SE" dirty="0"/>
           </a:p>
         </p:txBody>
       </p:sp>
@@ -1908,7 +1909,7 @@
               <a:rPr lang="sv-SE" smtClean="0"/>
               <a:t>‹#›</a:t>
             </a:fld>
-            <a:endParaRPr lang="sv-SE"/>
+            <a:endParaRPr lang="sv-SE" dirty="0"/>
           </a:p>
         </p:txBody>
       </p:sp>
@@ -2267,9 +2268,9 @@
           <a:p>
             <a:fld id="{1CB116C7-4A20-444B-AB97-BC343238C251}" type="datetimeFigureOut">
               <a:rPr lang="sv-SE" smtClean="0"/>
-              <a:t>2020-05-25</a:t>
+              <a:t>2020-11-18</a:t>
             </a:fld>
-            <a:endParaRPr lang="sv-SE"/>
+            <a:endParaRPr lang="sv-SE" dirty="0"/>
           </a:p>
         </p:txBody>
       </p:sp>
@@ -2294,7 +2295,7 @@
           <a:bodyPr/>
           <a:lstStyle/>
           <a:p>
-            <a:endParaRPr lang="sv-SE"/>
+            <a:endParaRPr lang="sv-SE" dirty="0"/>
           </a:p>
         </p:txBody>
       </p:sp>
@@ -2323,7 +2324,7 @@
               <a:rPr lang="sv-SE" smtClean="0"/>
               <a:t>‹#›</a:t>
             </a:fld>
-            <a:endParaRPr lang="sv-SE"/>
+            <a:endParaRPr lang="sv-SE" dirty="0"/>
           </a:p>
         </p:txBody>
       </p:sp>
@@ -2409,9 +2410,9 @@
           <a:p>
             <a:fld id="{1CB116C7-4A20-444B-AB97-BC343238C251}" type="datetimeFigureOut">
               <a:rPr lang="sv-SE" smtClean="0"/>
-              <a:t>2020-05-25</a:t>
+              <a:t>2020-11-18</a:t>
             </a:fld>
-            <a:endParaRPr lang="sv-SE"/>
+            <a:endParaRPr lang="sv-SE" dirty="0"/>
           </a:p>
         </p:txBody>
       </p:sp>
@@ -2436,7 +2437,7 @@
           <a:bodyPr/>
           <a:lstStyle/>
           <a:p>
-            <a:endParaRPr lang="sv-SE"/>
+            <a:endParaRPr lang="sv-SE" dirty="0"/>
           </a:p>
         </p:txBody>
       </p:sp>
@@ -2465,7 +2466,7 @@
               <a:rPr lang="sv-SE" smtClean="0"/>
               <a:t>‹#›</a:t>
             </a:fld>
-            <a:endParaRPr lang="sv-SE"/>
+            <a:endParaRPr lang="sv-SE" dirty="0"/>
           </a:p>
         </p:txBody>
       </p:sp>
@@ -2522,9 +2523,9 @@
           <a:p>
             <a:fld id="{1CB116C7-4A20-444B-AB97-BC343238C251}" type="datetimeFigureOut">
               <a:rPr lang="sv-SE" smtClean="0"/>
-              <a:t>2020-05-25</a:t>
+              <a:t>2020-11-18</a:t>
             </a:fld>
-            <a:endParaRPr lang="sv-SE"/>
+            <a:endParaRPr lang="sv-SE" dirty="0"/>
           </a:p>
         </p:txBody>
       </p:sp>
@@ -2549,7 +2550,7 @@
           <a:bodyPr/>
           <a:lstStyle/>
           <a:p>
-            <a:endParaRPr lang="sv-SE"/>
+            <a:endParaRPr lang="sv-SE" dirty="0"/>
           </a:p>
         </p:txBody>
       </p:sp>
@@ -2578,7 +2579,7 @@
               <a:rPr lang="sv-SE" smtClean="0"/>
               <a:t>‹#›</a:t>
             </a:fld>
-            <a:endParaRPr lang="sv-SE"/>
+            <a:endParaRPr lang="sv-SE" dirty="0"/>
           </a:p>
         </p:txBody>
       </p:sp>
@@ -2835,9 +2836,9 @@
           <a:p>
             <a:fld id="{1CB116C7-4A20-444B-AB97-BC343238C251}" type="datetimeFigureOut">
               <a:rPr lang="sv-SE" smtClean="0"/>
-              <a:t>2020-05-25</a:t>
+              <a:t>2020-11-18</a:t>
             </a:fld>
-            <a:endParaRPr lang="sv-SE"/>
+            <a:endParaRPr lang="sv-SE" dirty="0"/>
           </a:p>
         </p:txBody>
       </p:sp>
@@ -2862,7 +2863,7 @@
           <a:bodyPr/>
           <a:lstStyle/>
           <a:p>
-            <a:endParaRPr lang="sv-SE"/>
+            <a:endParaRPr lang="sv-SE" dirty="0"/>
           </a:p>
         </p:txBody>
       </p:sp>
@@ -2891,7 +2892,7 @@
               <a:rPr lang="sv-SE" smtClean="0"/>
               <a:t>‹#›</a:t>
             </a:fld>
-            <a:endParaRPr lang="sv-SE"/>
+            <a:endParaRPr lang="sv-SE" dirty="0"/>
           </a:p>
         </p:txBody>
       </p:sp>
@@ -3026,7 +3027,7 @@
             </a:lvl9pPr>
           </a:lstStyle>
           <a:p>
-            <a:endParaRPr lang="sv-SE"/>
+            <a:endParaRPr lang="sv-SE" dirty="0"/>
           </a:p>
         </p:txBody>
       </p:sp>
@@ -3124,9 +3125,9 @@
           <a:p>
             <a:fld id="{1CB116C7-4A20-444B-AB97-BC343238C251}" type="datetimeFigureOut">
               <a:rPr lang="sv-SE" smtClean="0"/>
-              <a:t>2020-05-25</a:t>
+              <a:t>2020-11-18</a:t>
             </a:fld>
-            <a:endParaRPr lang="sv-SE"/>
+            <a:endParaRPr lang="sv-SE" dirty="0"/>
           </a:p>
         </p:txBody>
       </p:sp>
@@ -3151,7 +3152,7 @@
           <a:bodyPr/>
           <a:lstStyle/>
           <a:p>
-            <a:endParaRPr lang="sv-SE"/>
+            <a:endParaRPr lang="sv-SE" dirty="0"/>
           </a:p>
         </p:txBody>
       </p:sp>
@@ -3180,7 +3181,7 @@
               <a:rPr lang="sv-SE" smtClean="0"/>
               <a:t>‹#›</a:t>
             </a:fld>
-            <a:endParaRPr lang="sv-SE"/>
+            <a:endParaRPr lang="sv-SE" dirty="0"/>
           </a:p>
         </p:txBody>
       </p:sp>
@@ -3367,9 +3368,9 @@
           <a:p>
             <a:fld id="{1CB116C7-4A20-444B-AB97-BC343238C251}" type="datetimeFigureOut">
               <a:rPr lang="sv-SE" smtClean="0"/>
-              <a:t>2020-05-25</a:t>
+              <a:t>2020-11-18</a:t>
             </a:fld>
-            <a:endParaRPr lang="sv-SE"/>
+            <a:endParaRPr lang="sv-SE" dirty="0"/>
           </a:p>
         </p:txBody>
       </p:sp>
@@ -3412,7 +3413,7 @@
             </a:lvl1pPr>
           </a:lstStyle>
           <a:p>
-            <a:endParaRPr lang="sv-SE"/>
+            <a:endParaRPr lang="sv-SE" dirty="0"/>
           </a:p>
         </p:txBody>
       </p:sp>
@@ -3459,7 +3460,7 @@
               <a:rPr lang="sv-SE" smtClean="0"/>
               <a:t>‹#›</a:t>
             </a:fld>
-            <a:endParaRPr lang="sv-SE"/>
+            <a:endParaRPr lang="sv-SE" dirty="0"/>
           </a:p>
         </p:txBody>
       </p:sp>
@@ -3831,21 +3832,20 @@
           <a:bodyPr rtlCol="0" anchor="ctr"/>
           <a:lstStyle/>
           <a:p>
-            <a:r>
-              <a:rPr lang="sv-SE" dirty="0" err="1">
-                <a:solidFill>
-                  <a:schemeClr val="tx1"/>
-                </a:solidFill>
-              </a:rPr>
-              <a:t>class</a:t>
-            </a:r>
+            <a:endParaRPr lang="sv-SE" dirty="0">
+              <a:solidFill>
+                <a:schemeClr val="tx1"/>
+              </a:solidFill>
+            </a:endParaRPr>
+          </a:p>
+          <a:p>
             <a:r>
               <a:rPr lang="sv-SE" dirty="0">
                 <a:solidFill>
                   <a:schemeClr val="tx1"/>
                 </a:solidFill>
               </a:rPr>
-              <a:t> Data</a:t>
+              <a:t>class Data:</a:t>
             </a:r>
           </a:p>
           <a:p>
@@ -3855,152 +3855,24 @@
                   <a:schemeClr val="tx1"/>
                 </a:solidFill>
               </a:rPr>
-              <a:t>    </a:t>
-            </a:r>
-            <a:r>
-              <a:rPr lang="sv-SE" dirty="0" err="1">
-                <a:solidFill>
-                  <a:schemeClr val="tx1"/>
-                </a:solidFill>
-              </a:rPr>
-              <a:t>def</a:t>
-            </a:r>
+              <a:t>    def __init__(self, is_train=True)</a:t>
+            </a:r>
+          </a:p>
+          <a:p>
+            <a:endParaRPr lang="sv-SE" dirty="0">
+              <a:solidFill>
+                <a:schemeClr val="tx1"/>
+              </a:solidFill>
+            </a:endParaRPr>
+          </a:p>
+          <a:p>
             <a:r>
               <a:rPr lang="sv-SE" dirty="0">
                 <a:solidFill>
                   <a:schemeClr val="tx1"/>
                 </a:solidFill>
               </a:rPr>
-              <a:t> __</a:t>
-            </a:r>
-            <a:r>
-              <a:rPr lang="sv-SE" dirty="0" err="1">
-                <a:solidFill>
-                  <a:schemeClr val="tx1"/>
-                </a:solidFill>
-              </a:rPr>
-              <a:t>init</a:t>
-            </a:r>
-            <a:r>
-              <a:rPr lang="sv-SE" dirty="0">
-                <a:solidFill>
-                  <a:schemeClr val="tx1"/>
-                </a:solidFill>
-              </a:rPr>
-              <a:t>__(</a:t>
-            </a:r>
-            <a:r>
-              <a:rPr lang="sv-SE" dirty="0" err="1">
-                <a:solidFill>
-                  <a:schemeClr val="tx1"/>
-                </a:solidFill>
-              </a:rPr>
-              <a:t>self</a:t>
-            </a:r>
-            <a:r>
-              <a:rPr lang="sv-SE" dirty="0">
-                <a:solidFill>
-                  <a:schemeClr val="tx1"/>
-                </a:solidFill>
-              </a:rPr>
-              <a:t>, </a:t>
-            </a:r>
-            <a:r>
-              <a:rPr lang="sv-SE" dirty="0" err="1">
-                <a:solidFill>
-                  <a:schemeClr val="tx1"/>
-                </a:solidFill>
-              </a:rPr>
-              <a:t>is_train</a:t>
-            </a:r>
-            <a:r>
-              <a:rPr lang="sv-SE" dirty="0">
-                <a:solidFill>
-                  <a:schemeClr val="tx1"/>
-                </a:solidFill>
-              </a:rPr>
-              <a:t>=</a:t>
-            </a:r>
-            <a:r>
-              <a:rPr lang="sv-SE" dirty="0" err="1">
-                <a:solidFill>
-                  <a:schemeClr val="tx1"/>
-                </a:solidFill>
-              </a:rPr>
-              <a:t>True</a:t>
-            </a:r>
-            <a:r>
-              <a:rPr lang="sv-SE" dirty="0">
-                <a:solidFill>
-                  <a:schemeClr val="tx1"/>
-                </a:solidFill>
-              </a:rPr>
-              <a:t>)</a:t>
-            </a:r>
-          </a:p>
-          <a:p>
-            <a:endParaRPr lang="sv-SE" dirty="0">
-              <a:solidFill>
-                <a:schemeClr val="tx1"/>
-              </a:solidFill>
-            </a:endParaRPr>
-          </a:p>
-          <a:p>
-            <a:r>
-              <a:rPr lang="sv-SE" dirty="0">
-                <a:solidFill>
-                  <a:schemeClr val="tx1"/>
-                </a:solidFill>
-              </a:rPr>
-              <a:t>    </a:t>
-            </a:r>
-            <a:r>
-              <a:rPr lang="sv-SE" dirty="0" err="1">
-                <a:solidFill>
-                  <a:schemeClr val="tx1"/>
-                </a:solidFill>
-              </a:rPr>
-              <a:t>def</a:t>
-            </a:r>
-            <a:r>
-              <a:rPr lang="sv-SE" dirty="0">
-                <a:solidFill>
-                  <a:schemeClr val="tx1"/>
-                </a:solidFill>
-              </a:rPr>
-              <a:t> </a:t>
-            </a:r>
-            <a:r>
-              <a:rPr lang="sv-SE" dirty="0" err="1">
-                <a:solidFill>
-                  <a:schemeClr val="tx1"/>
-                </a:solidFill>
-              </a:rPr>
-              <a:t>master_df</a:t>
-            </a:r>
-            <a:r>
-              <a:rPr lang="sv-SE" dirty="0">
-                <a:solidFill>
-                  <a:schemeClr val="tx1"/>
-                </a:solidFill>
-              </a:rPr>
-              <a:t>(</a:t>
-            </a:r>
-            <a:r>
-              <a:rPr lang="sv-SE" dirty="0" err="1">
-                <a:solidFill>
-                  <a:schemeClr val="tx1"/>
-                </a:solidFill>
-              </a:rPr>
-              <a:t>self</a:t>
-            </a:r>
-            <a:r>
-              <a:rPr lang="sv-SE" dirty="0">
-                <a:solidFill>
-                  <a:schemeClr val="tx1"/>
-                </a:solidFill>
-              </a:rPr>
-              <a:t>)</a:t>
+              <a:t>    def master_df(self)</a:t>
             </a:r>
           </a:p>
           <a:p>
@@ -4083,7 +3955,7 @@
         </p:nvSpPr>
         <p:spPr>
           <a:xfrm>
-            <a:off x="8448828" y="176821"/>
+            <a:off x="8576648" y="365077"/>
             <a:ext cx="858983" cy="360218"/>
           </a:xfrm>
           <a:prstGeom prst="rect">
@@ -4120,10 +3992,9 @@
           <a:p>
             <a:pPr algn="ctr"/>
             <a:r>
-              <a:rPr lang="sv-SE" dirty="0" err="1"/>
+              <a:rPr lang="sv-SE" dirty="0"/>
               <a:t>Python</a:t>
             </a:r>
-            <a:endParaRPr lang="sv-SE" dirty="0"/>
           </a:p>
         </p:txBody>
       </p:sp>
@@ -4141,8 +4012,8 @@
         </p:nvSpPr>
         <p:spPr>
           <a:xfrm>
-            <a:off x="8448828" y="547343"/>
-            <a:ext cx="3417455" cy="1829868"/>
+            <a:off x="8576648" y="735599"/>
+            <a:ext cx="3417455" cy="1406963"/>
           </a:xfrm>
           <a:prstGeom prst="rect">
             <a:avLst/>
@@ -4180,7 +4051,7 @@
                   <a:schemeClr val="tx1"/>
                 </a:solidFill>
               </a:rPr>
-              <a:t>Class Pipeline</a:t>
+              <a:t>class Pipeline:</a:t>
             </a:r>
           </a:p>
           <a:p>
@@ -4190,217 +4061,24 @@
                   <a:schemeClr val="tx1"/>
                 </a:solidFill>
               </a:rPr>
-              <a:t>    </a:t>
-            </a:r>
-            <a:r>
-              <a:rPr lang="sv-SE" dirty="0" err="1">
-                <a:solidFill>
-                  <a:schemeClr val="tx1"/>
-                </a:solidFill>
-              </a:rPr>
-              <a:t>def</a:t>
-            </a:r>
+              <a:t>    def __init__(self, is_train=True)</a:t>
+            </a:r>
+          </a:p>
+          <a:p>
+            <a:endParaRPr lang="sv-SE" dirty="0">
+              <a:solidFill>
+                <a:schemeClr val="tx1"/>
+              </a:solidFill>
+            </a:endParaRPr>
+          </a:p>
+          <a:p>
             <a:r>
               <a:rPr lang="sv-SE" dirty="0">
                 <a:solidFill>
                   <a:schemeClr val="tx1"/>
                 </a:solidFill>
               </a:rPr>
-              <a:t> __</a:t>
-            </a:r>
-            <a:r>
-              <a:rPr lang="sv-SE" dirty="0" err="1">
-                <a:solidFill>
-                  <a:schemeClr val="tx1"/>
-                </a:solidFill>
-              </a:rPr>
-              <a:t>init</a:t>
-            </a:r>
-            <a:r>
-              <a:rPr lang="sv-SE" dirty="0">
-                <a:solidFill>
-                  <a:schemeClr val="tx1"/>
-                </a:solidFill>
-              </a:rPr>
-              <a:t>__(</a:t>
-            </a:r>
-            <a:r>
-              <a:rPr lang="sv-SE" dirty="0" err="1">
-                <a:solidFill>
-                  <a:schemeClr val="tx1"/>
-                </a:solidFill>
-              </a:rPr>
-              <a:t>self</a:t>
-            </a:r>
-            <a:r>
-              <a:rPr lang="sv-SE" dirty="0">
-                <a:solidFill>
-                  <a:schemeClr val="tx1"/>
-                </a:solidFill>
-              </a:rPr>
-              <a:t>, </a:t>
-            </a:r>
-            <a:r>
-              <a:rPr lang="sv-SE" dirty="0" err="1">
-                <a:solidFill>
-                  <a:schemeClr val="tx1"/>
-                </a:solidFill>
-              </a:rPr>
-              <a:t>is_train</a:t>
-            </a:r>
-            <a:r>
-              <a:rPr lang="sv-SE" dirty="0">
-                <a:solidFill>
-                  <a:schemeClr val="tx1"/>
-                </a:solidFill>
-              </a:rPr>
-              <a:t>=</a:t>
-            </a:r>
-            <a:r>
-              <a:rPr lang="sv-SE" dirty="0" err="1">
-                <a:solidFill>
-                  <a:schemeClr val="tx1"/>
-                </a:solidFill>
-              </a:rPr>
-              <a:t>True</a:t>
-            </a:r>
-            <a:r>
-              <a:rPr lang="sv-SE" dirty="0">
-                <a:solidFill>
-                  <a:schemeClr val="tx1"/>
-                </a:solidFill>
-              </a:rPr>
-              <a:t>)</a:t>
-            </a:r>
-          </a:p>
-          <a:p>
-            <a:endParaRPr lang="sv-SE" dirty="0">
-              <a:solidFill>
-                <a:schemeClr val="tx1"/>
-              </a:solidFill>
-            </a:endParaRPr>
-          </a:p>
-          <a:p>
-            <a:r>
-              <a:rPr lang="sv-SE" dirty="0">
-                <a:solidFill>
-                  <a:schemeClr val="tx1"/>
-                </a:solidFill>
-              </a:rPr>
-              <a:t>    </a:t>
-            </a:r>
-            <a:r>
-              <a:rPr lang="sv-SE" dirty="0" err="1">
-                <a:solidFill>
-                  <a:schemeClr val="tx1"/>
-                </a:solidFill>
-              </a:rPr>
-              <a:t>def</a:t>
-            </a:r>
-            <a:r>
-              <a:rPr lang="sv-SE" dirty="0">
-                <a:solidFill>
-                  <a:schemeClr val="tx1"/>
-                </a:solidFill>
-              </a:rPr>
-              <a:t> </a:t>
-            </a:r>
-            <a:r>
-              <a:rPr lang="sv-SE" dirty="0" err="1">
-                <a:solidFill>
-                  <a:schemeClr val="tx1"/>
-                </a:solidFill>
-              </a:rPr>
-              <a:t>train</a:t>
-            </a:r>
-            <a:r>
-              <a:rPr lang="sv-SE" dirty="0">
-                <a:solidFill>
-                  <a:schemeClr val="tx1"/>
-                </a:solidFill>
-              </a:rPr>
-              <a:t>(</a:t>
-            </a:r>
-            <a:r>
-              <a:rPr lang="sv-SE" dirty="0" err="1">
-                <a:solidFill>
-                  <a:schemeClr val="tx1"/>
-                </a:solidFill>
-              </a:rPr>
-              <a:t>self</a:t>
-            </a:r>
-            <a:r>
-              <a:rPr lang="sv-SE" dirty="0">
-                <a:solidFill>
-                  <a:schemeClr val="tx1"/>
-                </a:solidFill>
-              </a:rPr>
-              <a:t>)</a:t>
-            </a:r>
-          </a:p>
-          <a:p>
-            <a:endParaRPr lang="sv-SE" dirty="0">
-              <a:solidFill>
-                <a:schemeClr val="tx1"/>
-              </a:solidFill>
-            </a:endParaRPr>
-          </a:p>
-          <a:p>
-            <a:r>
-              <a:rPr lang="sv-SE" dirty="0">
-                <a:solidFill>
-                  <a:schemeClr val="tx1"/>
-                </a:solidFill>
-              </a:rPr>
-              <a:t>    </a:t>
-            </a:r>
-            <a:r>
-              <a:rPr lang="sv-SE" dirty="0" err="1">
-                <a:solidFill>
-                  <a:schemeClr val="tx1"/>
-                </a:solidFill>
-              </a:rPr>
-              <a:t>def</a:t>
-            </a:r>
-            <a:r>
-              <a:rPr lang="sv-SE" dirty="0">
-                <a:solidFill>
-                  <a:schemeClr val="tx1"/>
-                </a:solidFill>
-              </a:rPr>
-              <a:t> </a:t>
-            </a:r>
-            <a:r>
-              <a:rPr lang="sv-SE" dirty="0" err="1">
-                <a:solidFill>
-                  <a:schemeClr val="tx1"/>
-                </a:solidFill>
-              </a:rPr>
-              <a:t>predict</a:t>
-            </a:r>
-            <a:r>
-              <a:rPr lang="sv-SE" dirty="0">
-                <a:solidFill>
-                  <a:schemeClr val="tx1"/>
-                </a:solidFill>
-              </a:rPr>
-              <a:t>(</a:t>
-            </a:r>
-            <a:r>
-              <a:rPr lang="sv-SE" dirty="0" err="1">
-                <a:solidFill>
-                  <a:schemeClr val="tx1"/>
-                </a:solidFill>
-              </a:rPr>
-              <a:t>self</a:t>
-            </a:r>
-            <a:r>
-              <a:rPr lang="sv-SE" dirty="0">
-                <a:solidFill>
-                  <a:schemeClr val="tx1"/>
-                </a:solidFill>
-              </a:rPr>
-              <a:t>)</a:t>
+              <a:t>    def run(self)</a:t>
             </a:r>
           </a:p>
         </p:txBody>
@@ -4419,7 +4097,7 @@
         </p:nvSpPr>
         <p:spPr>
           <a:xfrm>
-            <a:off x="3655834" y="1194999"/>
+            <a:off x="3557509" y="1194999"/>
             <a:ext cx="628073" cy="406400"/>
           </a:xfrm>
           <a:prstGeom prst="rightArrow">
@@ -4453,7 +4131,7 @@
           <a:lstStyle/>
           <a:p>
             <a:pPr algn="ctr"/>
-            <a:endParaRPr lang="sv-SE"/>
+            <a:endParaRPr lang="sv-SE" dirty="0"/>
           </a:p>
         </p:txBody>
       </p:sp>
@@ -4471,7 +4149,7 @@
         </p:nvSpPr>
         <p:spPr>
           <a:xfrm rot="10800000">
-            <a:off x="7746999" y="1173018"/>
+            <a:off x="7904315" y="1173017"/>
             <a:ext cx="628073" cy="406400"/>
           </a:xfrm>
           <a:prstGeom prst="rightArrow">
@@ -4505,7 +4183,7 @@
           <a:lstStyle/>
           <a:p>
             <a:pPr algn="ctr"/>
-            <a:endParaRPr lang="sv-SE"/>
+            <a:endParaRPr lang="sv-SE" dirty="0"/>
           </a:p>
         </p:txBody>
       </p:sp>
@@ -4523,8 +4201,8 @@
         </p:nvSpPr>
         <p:spPr>
           <a:xfrm>
-            <a:off x="4405743" y="445630"/>
-            <a:ext cx="3267500" cy="2030803"/>
+            <a:off x="4229842" y="474054"/>
+            <a:ext cx="3637044" cy="1930051"/>
           </a:xfrm>
           <a:prstGeom prst="rect">
             <a:avLst/>
@@ -4532,7 +4210,7 @@
           <a:noFill/>
           <a:ln>
             <a:solidFill>
-              <a:srgbClr val="FF0000"/>
+              <a:schemeClr val="tx1"/>
             </a:solidFill>
           </a:ln>
         </p:spPr>
@@ -4556,23 +4234,44 @@
           <a:bodyPr rtlCol="0" anchor="ctr"/>
           <a:lstStyle/>
           <a:p>
-            <a:r>
-              <a:rPr lang="sv-SE" sz="1200" dirty="0">
+            <a:endParaRPr lang="sv-SE" sz="1600" dirty="0">
+              <a:solidFill>
+                <a:schemeClr val="tx1"/>
+              </a:solidFill>
+            </a:endParaRPr>
+          </a:p>
+          <a:p>
+            <a:r>
+              <a:rPr lang="sv-SE" sz="1600" dirty="0">
                 <a:solidFill>
                   <a:schemeClr val="tx1"/>
                 </a:solidFill>
               </a:rPr>
-              <a:t>@</a:t>
-            </a:r>
-            <a:r>
-              <a:rPr lang="sv-SE" sz="1200" dirty="0" err="1">
+              <a:t>def train()</a:t>
+            </a:r>
+          </a:p>
+          <a:p>
+            <a:r>
+              <a:rPr lang="sv-SE" sz="1600" dirty="0">
                 <a:solidFill>
                   <a:schemeClr val="tx1"/>
                 </a:solidFill>
               </a:rPr>
-              <a:t>pandas_udf</a:t>
-            </a:r>
-            <a:endParaRPr lang="sv-SE" sz="1200" dirty="0">
+              <a:t>    pipeline =Pipeline(pd.df, is_train=True)</a:t>
+            </a:r>
+          </a:p>
+          <a:p>
+            <a:r>
+              <a:rPr lang="sv-SE" sz="1600" dirty="0">
+                <a:solidFill>
+                  <a:schemeClr val="tx1"/>
+                </a:solidFill>
+              </a:rPr>
+              <a:t>    pipeline.run()</a:t>
+            </a:r>
+          </a:p>
+          <a:p>
+            <a:endParaRPr lang="sv-SE" sz="1600" dirty="0">
               <a:solidFill>
                 <a:schemeClr val="tx1"/>
               </a:solidFill>
@@ -4580,315 +4279,1297 @@
           </a:p>
           <a:p>
             <a:r>
-              <a:rPr lang="sv-SE" sz="1200" dirty="0" err="1">
+              <a:rPr lang="sv-SE" sz="1600" dirty="0">
                 <a:solidFill>
                   <a:schemeClr val="tx1"/>
                 </a:solidFill>
               </a:rPr>
-              <a:t>def</a:t>
-            </a:r>
-            <a:r>
-              <a:rPr lang="sv-SE" sz="1200" dirty="0">
+              <a:t>df = Data.master_df</a:t>
+            </a:r>
+          </a:p>
+          <a:p>
+            <a:r>
+              <a:rPr lang="sv-SE" sz="1600" dirty="0">
                 <a:solidFill>
                   <a:schemeClr val="tx1"/>
                 </a:solidFill>
               </a:rPr>
-              <a:t> </a:t>
-            </a:r>
-            <a:r>
-              <a:rPr lang="sv-SE" sz="1200" dirty="0" err="1">
+              <a:t>                 .groupby(”scenario_id”)</a:t>
+            </a:r>
+          </a:p>
+          <a:p>
+            <a:r>
+              <a:rPr lang="sv-SE" sz="1600" dirty="0">
                 <a:solidFill>
                   <a:schemeClr val="tx1"/>
                 </a:solidFill>
               </a:rPr>
-              <a:t>train</a:t>
-            </a:r>
-            <a:r>
-              <a:rPr lang="sv-SE" sz="1200" dirty="0">
+              <a:t>                 .applyInPandas(train)</a:t>
+            </a:r>
+          </a:p>
+          <a:p>
+            <a:endParaRPr lang="sv-SE" sz="1600" dirty="0">
+              <a:solidFill>
+                <a:schemeClr val="tx1"/>
+              </a:solidFill>
+            </a:endParaRPr>
+          </a:p>
+        </p:txBody>
+      </p:sp>
+    </p:spTree>
+    <p:extLst>
+      <p:ext uri="{BB962C8B-B14F-4D97-AF65-F5344CB8AC3E}">
+        <p14:creationId xmlns:p14="http://schemas.microsoft.com/office/powerpoint/2010/main" val="2291919979"/>
+      </p:ext>
+    </p:extLst>
+  </p:cSld>
+  <p:clrMapOvr>
+    <a:masterClrMapping/>
+  </p:clrMapOvr>
+</p:sld>
+</file>
+
+<file path=ppt/slides/slide2.xml><?xml version="1.0" encoding="utf-8"?>
+<p:sld xmlns:a="http://schemas.openxmlformats.org/drawingml/2006/main" xmlns:r="http://schemas.openxmlformats.org/officeDocument/2006/relationships" xmlns:p="http://schemas.openxmlformats.org/presentationml/2006/main">
+  <p:cSld>
+    <p:spTree>
+      <p:nvGrpSpPr>
+        <p:cNvPr id="1" name=""/>
+        <p:cNvGrpSpPr/>
+        <p:nvPr/>
+      </p:nvGrpSpPr>
+      <p:grpSpPr>
+        <a:xfrm>
+          <a:off x="0" y="0"/>
+          <a:ext cx="0" cy="0"/>
+          <a:chOff x="0" y="0"/>
+          <a:chExt cx="0" cy="0"/>
+        </a:xfrm>
+      </p:grpSpPr>
+      <p:sp>
+        <p:nvSpPr>
+          <p:cNvPr id="5" name="Rectangle 4">
+            <a:extLst>
+              <a:ext uri="{FF2B5EF4-FFF2-40B4-BE49-F238E27FC236}">
+                <a16:creationId xmlns:a16="http://schemas.microsoft.com/office/drawing/2014/main" id="{3D8EF916-9BA8-8543-B735-08B9AEFE3BC5}"/>
+              </a:ext>
+            </a:extLst>
+          </p:cNvPr>
+          <p:cNvSpPr/>
+          <p:nvPr/>
+        </p:nvSpPr>
+        <p:spPr>
+          <a:xfrm>
+            <a:off x="388375" y="1762426"/>
+            <a:ext cx="3588774" cy="560438"/>
+          </a:xfrm>
+          <a:prstGeom prst="rect">
+            <a:avLst/>
+          </a:prstGeom>
+          <a:solidFill>
+            <a:srgbClr val="C00000"/>
+          </a:solidFill>
+        </p:spPr>
+        <p:style>
+          <a:lnRef idx="2">
+            <a:schemeClr val="accent1">
+              <a:shade val="50000"/>
+            </a:schemeClr>
+          </a:lnRef>
+          <a:fillRef idx="1">
+            <a:schemeClr val="accent1"/>
+          </a:fillRef>
+          <a:effectRef idx="0">
+            <a:schemeClr val="accent1"/>
+          </a:effectRef>
+          <a:fontRef idx="minor">
+            <a:schemeClr val="lt1"/>
+          </a:fontRef>
+        </p:style>
+        <p:txBody>
+          <a:bodyPr rtlCol="0" anchor="ctr"/>
+          <a:lstStyle/>
+          <a:p>
+            <a:pPr algn="ctr"/>
+            <a:r>
+              <a:rPr lang="sv-SE" sz="2800" dirty="0"/>
+              <a:t>SCENARIO 1</a:t>
+            </a:r>
+          </a:p>
+        </p:txBody>
+      </p:sp>
+      <p:sp>
+        <p:nvSpPr>
+          <p:cNvPr id="6" name="Rectangle 5">
+            <a:extLst>
+              <a:ext uri="{FF2B5EF4-FFF2-40B4-BE49-F238E27FC236}">
+                <a16:creationId xmlns:a16="http://schemas.microsoft.com/office/drawing/2014/main" id="{BA09B661-3D49-644F-A2B3-8306D38CB27E}"/>
+              </a:ext>
+            </a:extLst>
+          </p:cNvPr>
+          <p:cNvSpPr/>
+          <p:nvPr/>
+        </p:nvSpPr>
+        <p:spPr>
+          <a:xfrm>
+            <a:off x="388375" y="2322864"/>
+            <a:ext cx="3588774" cy="560438"/>
+          </a:xfrm>
+          <a:prstGeom prst="rect">
+            <a:avLst/>
+          </a:prstGeom>
+          <a:solidFill>
+            <a:srgbClr val="FF0000"/>
+          </a:solidFill>
+        </p:spPr>
+        <p:style>
+          <a:lnRef idx="2">
+            <a:schemeClr val="accent1">
+              <a:shade val="50000"/>
+            </a:schemeClr>
+          </a:lnRef>
+          <a:fillRef idx="1">
+            <a:schemeClr val="accent1"/>
+          </a:fillRef>
+          <a:effectRef idx="0">
+            <a:schemeClr val="accent1"/>
+          </a:effectRef>
+          <a:fontRef idx="minor">
+            <a:schemeClr val="lt1"/>
+          </a:fontRef>
+        </p:style>
+        <p:txBody>
+          <a:bodyPr rtlCol="0" anchor="ctr"/>
+          <a:lstStyle/>
+          <a:p>
+            <a:pPr algn="ctr"/>
+            <a:r>
+              <a:rPr lang="sv-SE" sz="2800" dirty="0"/>
+              <a:t>SCENARIO 2</a:t>
+            </a:r>
+          </a:p>
+        </p:txBody>
+      </p:sp>
+      <p:sp>
+        <p:nvSpPr>
+          <p:cNvPr id="7" name="Rectangle 6">
+            <a:extLst>
+              <a:ext uri="{FF2B5EF4-FFF2-40B4-BE49-F238E27FC236}">
+                <a16:creationId xmlns:a16="http://schemas.microsoft.com/office/drawing/2014/main" id="{4B96162B-17B9-184C-885C-80BFE3C8D4A7}"/>
+              </a:ext>
+            </a:extLst>
+          </p:cNvPr>
+          <p:cNvSpPr/>
+          <p:nvPr/>
+        </p:nvSpPr>
+        <p:spPr>
+          <a:xfrm>
+            <a:off x="388375" y="2883302"/>
+            <a:ext cx="3588774" cy="560438"/>
+          </a:xfrm>
+          <a:prstGeom prst="rect">
+            <a:avLst/>
+          </a:prstGeom>
+          <a:solidFill>
+            <a:srgbClr val="FFC000"/>
+          </a:solidFill>
+        </p:spPr>
+        <p:style>
+          <a:lnRef idx="2">
+            <a:schemeClr val="accent1">
+              <a:shade val="50000"/>
+            </a:schemeClr>
+          </a:lnRef>
+          <a:fillRef idx="1">
+            <a:schemeClr val="accent1"/>
+          </a:fillRef>
+          <a:effectRef idx="0">
+            <a:schemeClr val="accent1"/>
+          </a:effectRef>
+          <a:fontRef idx="minor">
+            <a:schemeClr val="lt1"/>
+          </a:fontRef>
+        </p:style>
+        <p:txBody>
+          <a:bodyPr rtlCol="0" anchor="ctr"/>
+          <a:lstStyle/>
+          <a:p>
+            <a:pPr algn="ctr"/>
+            <a:r>
+              <a:rPr lang="sv-SE" sz="2800" dirty="0"/>
+              <a:t>SCENARIO 3</a:t>
+            </a:r>
+          </a:p>
+        </p:txBody>
+      </p:sp>
+      <p:sp>
+        <p:nvSpPr>
+          <p:cNvPr id="9" name="Rectangle 8">
+            <a:extLst>
+              <a:ext uri="{FF2B5EF4-FFF2-40B4-BE49-F238E27FC236}">
+                <a16:creationId xmlns:a16="http://schemas.microsoft.com/office/drawing/2014/main" id="{9DC5C93A-B6BE-AE43-A47C-F58DF7E79246}"/>
+              </a:ext>
+            </a:extLst>
+          </p:cNvPr>
+          <p:cNvSpPr/>
+          <p:nvPr/>
+        </p:nvSpPr>
+        <p:spPr>
+          <a:xfrm>
+            <a:off x="388375" y="4746516"/>
+            <a:ext cx="3588774" cy="560438"/>
+          </a:xfrm>
+          <a:prstGeom prst="rect">
+            <a:avLst/>
+          </a:prstGeom>
+          <a:solidFill>
+            <a:srgbClr val="00B050"/>
+          </a:solidFill>
+        </p:spPr>
+        <p:style>
+          <a:lnRef idx="2">
+            <a:schemeClr val="accent1">
+              <a:shade val="50000"/>
+            </a:schemeClr>
+          </a:lnRef>
+          <a:fillRef idx="1">
+            <a:schemeClr val="accent1"/>
+          </a:fillRef>
+          <a:effectRef idx="0">
+            <a:schemeClr val="accent1"/>
+          </a:effectRef>
+          <a:fontRef idx="minor">
+            <a:schemeClr val="lt1"/>
+          </a:fontRef>
+        </p:style>
+        <p:txBody>
+          <a:bodyPr rtlCol="0" anchor="ctr"/>
+          <a:lstStyle/>
+          <a:p>
+            <a:pPr algn="ctr"/>
+            <a:r>
+              <a:rPr lang="sv-SE" sz="2800" dirty="0"/>
+              <a:t>SCENARIO N</a:t>
+            </a:r>
+          </a:p>
+        </p:txBody>
+      </p:sp>
+      <p:sp>
+        <p:nvSpPr>
+          <p:cNvPr id="10" name="Oval 9">
+            <a:extLst>
+              <a:ext uri="{FF2B5EF4-FFF2-40B4-BE49-F238E27FC236}">
+                <a16:creationId xmlns:a16="http://schemas.microsoft.com/office/drawing/2014/main" id="{8EC43E05-1ADF-ED4B-84E8-FD7C5589E6C1}"/>
+              </a:ext>
+            </a:extLst>
+          </p:cNvPr>
+          <p:cNvSpPr/>
+          <p:nvPr/>
+        </p:nvSpPr>
+        <p:spPr>
+          <a:xfrm>
+            <a:off x="2074607" y="3601057"/>
+            <a:ext cx="216309" cy="226142"/>
+          </a:xfrm>
+          <a:prstGeom prst="ellipse">
+            <a:avLst/>
+          </a:prstGeom>
+          <a:solidFill>
+            <a:schemeClr val="tx1"/>
+          </a:solidFill>
+        </p:spPr>
+        <p:style>
+          <a:lnRef idx="2">
+            <a:schemeClr val="accent1">
+              <a:shade val="50000"/>
+            </a:schemeClr>
+          </a:lnRef>
+          <a:fillRef idx="1">
+            <a:schemeClr val="accent1"/>
+          </a:fillRef>
+          <a:effectRef idx="0">
+            <a:schemeClr val="accent1"/>
+          </a:effectRef>
+          <a:fontRef idx="minor">
+            <a:schemeClr val="lt1"/>
+          </a:fontRef>
+        </p:style>
+        <p:txBody>
+          <a:bodyPr rtlCol="0" anchor="ctr"/>
+          <a:lstStyle/>
+          <a:p>
+            <a:pPr algn="ctr"/>
+            <a:endParaRPr lang="sv-SE" dirty="0"/>
+          </a:p>
+        </p:txBody>
+      </p:sp>
+      <p:sp>
+        <p:nvSpPr>
+          <p:cNvPr id="11" name="Oval 10">
+            <a:extLst>
+              <a:ext uri="{FF2B5EF4-FFF2-40B4-BE49-F238E27FC236}">
+                <a16:creationId xmlns:a16="http://schemas.microsoft.com/office/drawing/2014/main" id="{CBB0DE37-0EA2-1746-A188-5A1999BC08F8}"/>
+              </a:ext>
+            </a:extLst>
+          </p:cNvPr>
+          <p:cNvSpPr/>
+          <p:nvPr/>
+        </p:nvSpPr>
+        <p:spPr>
+          <a:xfrm>
+            <a:off x="2074606" y="3972220"/>
+            <a:ext cx="216309" cy="226142"/>
+          </a:xfrm>
+          <a:prstGeom prst="ellipse">
+            <a:avLst/>
+          </a:prstGeom>
+          <a:solidFill>
+            <a:schemeClr val="tx1"/>
+          </a:solidFill>
+        </p:spPr>
+        <p:style>
+          <a:lnRef idx="2">
+            <a:schemeClr val="accent1">
+              <a:shade val="50000"/>
+            </a:schemeClr>
+          </a:lnRef>
+          <a:fillRef idx="1">
+            <a:schemeClr val="accent1"/>
+          </a:fillRef>
+          <a:effectRef idx="0">
+            <a:schemeClr val="accent1"/>
+          </a:effectRef>
+          <a:fontRef idx="minor">
+            <a:schemeClr val="lt1"/>
+          </a:fontRef>
+        </p:style>
+        <p:txBody>
+          <a:bodyPr rtlCol="0" anchor="ctr"/>
+          <a:lstStyle/>
+          <a:p>
+            <a:pPr algn="ctr"/>
+            <a:endParaRPr lang="sv-SE" dirty="0"/>
+          </a:p>
+        </p:txBody>
+      </p:sp>
+      <p:sp>
+        <p:nvSpPr>
+          <p:cNvPr id="12" name="Oval 11">
+            <a:extLst>
+              <a:ext uri="{FF2B5EF4-FFF2-40B4-BE49-F238E27FC236}">
+                <a16:creationId xmlns:a16="http://schemas.microsoft.com/office/drawing/2014/main" id="{FD795F3E-CA58-3C4D-91EC-49AB1D18E5A6}"/>
+              </a:ext>
+            </a:extLst>
+          </p:cNvPr>
+          <p:cNvSpPr/>
+          <p:nvPr/>
+        </p:nvSpPr>
+        <p:spPr>
+          <a:xfrm>
+            <a:off x="2074605" y="4339702"/>
+            <a:ext cx="216309" cy="226142"/>
+          </a:xfrm>
+          <a:prstGeom prst="ellipse">
+            <a:avLst/>
+          </a:prstGeom>
+          <a:solidFill>
+            <a:schemeClr val="tx1"/>
+          </a:solidFill>
+        </p:spPr>
+        <p:style>
+          <a:lnRef idx="2">
+            <a:schemeClr val="accent1">
+              <a:shade val="50000"/>
+            </a:schemeClr>
+          </a:lnRef>
+          <a:fillRef idx="1">
+            <a:schemeClr val="accent1"/>
+          </a:fillRef>
+          <a:effectRef idx="0">
+            <a:schemeClr val="accent1"/>
+          </a:effectRef>
+          <a:fontRef idx="minor">
+            <a:schemeClr val="lt1"/>
+          </a:fontRef>
+        </p:style>
+        <p:txBody>
+          <a:bodyPr rtlCol="0" anchor="ctr"/>
+          <a:lstStyle/>
+          <a:p>
+            <a:pPr algn="ctr"/>
+            <a:endParaRPr lang="sv-SE" dirty="0"/>
+          </a:p>
+        </p:txBody>
+      </p:sp>
+      <p:sp>
+        <p:nvSpPr>
+          <p:cNvPr id="13" name="TextBox 12">
+            <a:extLst>
+              <a:ext uri="{FF2B5EF4-FFF2-40B4-BE49-F238E27FC236}">
+                <a16:creationId xmlns:a16="http://schemas.microsoft.com/office/drawing/2014/main" id="{12EF04CF-74D1-BE4F-9075-C66967EA28EA}"/>
+              </a:ext>
+            </a:extLst>
+          </p:cNvPr>
+          <p:cNvSpPr txBox="1"/>
+          <p:nvPr/>
+        </p:nvSpPr>
+        <p:spPr>
+          <a:xfrm>
+            <a:off x="1156308" y="196702"/>
+            <a:ext cx="1836593" cy="646331"/>
+          </a:xfrm>
+          <a:prstGeom prst="rect">
+            <a:avLst/>
+          </a:prstGeom>
+          <a:noFill/>
+        </p:spPr>
+        <p:txBody>
+          <a:bodyPr wrap="none" rtlCol="0">
+            <a:spAutoFit/>
+          </a:bodyPr>
+          <a:lstStyle/>
+          <a:p>
+            <a:r>
+              <a:rPr lang="sv-SE" sz="3600" b="1" dirty="0"/>
+              <a:t>Data ETL</a:t>
+            </a:r>
+          </a:p>
+        </p:txBody>
+      </p:sp>
+      <p:sp>
+        <p:nvSpPr>
+          <p:cNvPr id="14" name="Rectangle 13">
+            <a:extLst>
+              <a:ext uri="{FF2B5EF4-FFF2-40B4-BE49-F238E27FC236}">
+                <a16:creationId xmlns:a16="http://schemas.microsoft.com/office/drawing/2014/main" id="{1B7A68B6-54D4-3B45-83B3-F2BF14F38BAA}"/>
+              </a:ext>
+            </a:extLst>
+          </p:cNvPr>
+          <p:cNvSpPr/>
+          <p:nvPr/>
+        </p:nvSpPr>
+        <p:spPr>
+          <a:xfrm>
+            <a:off x="7929717" y="1715738"/>
+            <a:ext cx="3588774" cy="560438"/>
+          </a:xfrm>
+          <a:prstGeom prst="rect">
+            <a:avLst/>
+          </a:prstGeom>
+          <a:solidFill>
+            <a:srgbClr val="C00000"/>
+          </a:solidFill>
+        </p:spPr>
+        <p:style>
+          <a:lnRef idx="2">
+            <a:schemeClr val="accent1">
+              <a:shade val="50000"/>
+            </a:schemeClr>
+          </a:lnRef>
+          <a:fillRef idx="1">
+            <a:schemeClr val="accent1"/>
+          </a:fillRef>
+          <a:effectRef idx="0">
+            <a:schemeClr val="accent1"/>
+          </a:effectRef>
+          <a:fontRef idx="minor">
+            <a:schemeClr val="lt1"/>
+          </a:fontRef>
+        </p:style>
+        <p:txBody>
+          <a:bodyPr rtlCol="0" anchor="ctr"/>
+          <a:lstStyle/>
+          <a:p>
+            <a:pPr algn="ctr"/>
+            <a:r>
+              <a:rPr lang="sv-SE" sz="2800" dirty="0"/>
+              <a:t>SCENARIO 1</a:t>
+            </a:r>
+          </a:p>
+        </p:txBody>
+      </p:sp>
+      <p:sp>
+        <p:nvSpPr>
+          <p:cNvPr id="15" name="Rectangle 14">
+            <a:extLst>
+              <a:ext uri="{FF2B5EF4-FFF2-40B4-BE49-F238E27FC236}">
+                <a16:creationId xmlns:a16="http://schemas.microsoft.com/office/drawing/2014/main" id="{1A2FFE1D-8888-0844-A010-D6603191DA37}"/>
+              </a:ext>
+            </a:extLst>
+          </p:cNvPr>
+          <p:cNvSpPr/>
+          <p:nvPr/>
+        </p:nvSpPr>
+        <p:spPr>
+          <a:xfrm>
+            <a:off x="7929717" y="2786223"/>
+            <a:ext cx="3588774" cy="560438"/>
+          </a:xfrm>
+          <a:prstGeom prst="rect">
+            <a:avLst/>
+          </a:prstGeom>
+          <a:solidFill>
+            <a:srgbClr val="FF0000"/>
+          </a:solidFill>
+        </p:spPr>
+        <p:style>
+          <a:lnRef idx="2">
+            <a:schemeClr val="accent1">
+              <a:shade val="50000"/>
+            </a:schemeClr>
+          </a:lnRef>
+          <a:fillRef idx="1">
+            <a:schemeClr val="accent1"/>
+          </a:fillRef>
+          <a:effectRef idx="0">
+            <a:schemeClr val="accent1"/>
+          </a:effectRef>
+          <a:fontRef idx="minor">
+            <a:schemeClr val="lt1"/>
+          </a:fontRef>
+        </p:style>
+        <p:txBody>
+          <a:bodyPr rtlCol="0" anchor="ctr"/>
+          <a:lstStyle/>
+          <a:p>
+            <a:pPr algn="ctr"/>
+            <a:r>
+              <a:rPr lang="sv-SE" sz="2800" dirty="0"/>
+              <a:t>SCENARIO 2</a:t>
+            </a:r>
+          </a:p>
+        </p:txBody>
+      </p:sp>
+      <p:sp>
+        <p:nvSpPr>
+          <p:cNvPr id="16" name="Rectangle 15">
+            <a:extLst>
+              <a:ext uri="{FF2B5EF4-FFF2-40B4-BE49-F238E27FC236}">
+                <a16:creationId xmlns:a16="http://schemas.microsoft.com/office/drawing/2014/main" id="{CD7B2574-0908-4D45-AE32-4826A108E29D}"/>
+              </a:ext>
+            </a:extLst>
+          </p:cNvPr>
+          <p:cNvSpPr/>
+          <p:nvPr/>
+        </p:nvSpPr>
+        <p:spPr>
+          <a:xfrm>
+            <a:off x="7929717" y="3856696"/>
+            <a:ext cx="3588774" cy="560438"/>
+          </a:xfrm>
+          <a:prstGeom prst="rect">
+            <a:avLst/>
+          </a:prstGeom>
+          <a:solidFill>
+            <a:srgbClr val="FFC000"/>
+          </a:solidFill>
+        </p:spPr>
+        <p:style>
+          <a:lnRef idx="2">
+            <a:schemeClr val="accent1">
+              <a:shade val="50000"/>
+            </a:schemeClr>
+          </a:lnRef>
+          <a:fillRef idx="1">
+            <a:schemeClr val="accent1"/>
+          </a:fillRef>
+          <a:effectRef idx="0">
+            <a:schemeClr val="accent1"/>
+          </a:effectRef>
+          <a:fontRef idx="minor">
+            <a:schemeClr val="lt1"/>
+          </a:fontRef>
+        </p:style>
+        <p:txBody>
+          <a:bodyPr rtlCol="0" anchor="ctr"/>
+          <a:lstStyle/>
+          <a:p>
+            <a:pPr algn="ctr"/>
+            <a:r>
+              <a:rPr lang="sv-SE" sz="2800" dirty="0"/>
+              <a:t>SCENARIO 3</a:t>
+            </a:r>
+          </a:p>
+        </p:txBody>
+      </p:sp>
+      <p:sp>
+        <p:nvSpPr>
+          <p:cNvPr id="18" name="Rectangle 17">
+            <a:extLst>
+              <a:ext uri="{FF2B5EF4-FFF2-40B4-BE49-F238E27FC236}">
+                <a16:creationId xmlns:a16="http://schemas.microsoft.com/office/drawing/2014/main" id="{955ECC6F-DF08-3B4D-85BC-7232D586FE4D}"/>
+              </a:ext>
+            </a:extLst>
+          </p:cNvPr>
+          <p:cNvSpPr/>
+          <p:nvPr/>
+        </p:nvSpPr>
+        <p:spPr>
+          <a:xfrm>
+            <a:off x="7929717" y="5660916"/>
+            <a:ext cx="3588774" cy="560438"/>
+          </a:xfrm>
+          <a:prstGeom prst="rect">
+            <a:avLst/>
+          </a:prstGeom>
+          <a:solidFill>
+            <a:srgbClr val="00B050"/>
+          </a:solidFill>
+        </p:spPr>
+        <p:style>
+          <a:lnRef idx="2">
+            <a:schemeClr val="accent1">
+              <a:shade val="50000"/>
+            </a:schemeClr>
+          </a:lnRef>
+          <a:fillRef idx="1">
+            <a:schemeClr val="accent1"/>
+          </a:fillRef>
+          <a:effectRef idx="0">
+            <a:schemeClr val="accent1"/>
+          </a:effectRef>
+          <a:fontRef idx="minor">
+            <a:schemeClr val="lt1"/>
+          </a:fontRef>
+        </p:style>
+        <p:txBody>
+          <a:bodyPr rtlCol="0" anchor="ctr"/>
+          <a:lstStyle/>
+          <a:p>
+            <a:pPr algn="ctr"/>
+            <a:r>
+              <a:rPr lang="sv-SE" sz="2800" dirty="0"/>
+              <a:t>SCENARIO N</a:t>
+            </a:r>
+          </a:p>
+        </p:txBody>
+      </p:sp>
+      <p:sp>
+        <p:nvSpPr>
+          <p:cNvPr id="22" name="Oval 21">
+            <a:extLst>
+              <a:ext uri="{FF2B5EF4-FFF2-40B4-BE49-F238E27FC236}">
+                <a16:creationId xmlns:a16="http://schemas.microsoft.com/office/drawing/2014/main" id="{6FE3C7D4-74ED-5040-9DA7-1F17E6A7DD57}"/>
+              </a:ext>
+            </a:extLst>
+          </p:cNvPr>
+          <p:cNvSpPr/>
+          <p:nvPr/>
+        </p:nvSpPr>
+        <p:spPr>
+          <a:xfrm>
+            <a:off x="4925955" y="2814479"/>
+            <a:ext cx="2059862" cy="1741543"/>
+          </a:xfrm>
+          <a:prstGeom prst="ellipse">
+            <a:avLst/>
+          </a:prstGeom>
+          <a:solidFill>
+            <a:srgbClr val="00B0F0"/>
+          </a:solidFill>
+        </p:spPr>
+        <p:style>
+          <a:lnRef idx="2">
+            <a:schemeClr val="accent1">
+              <a:shade val="50000"/>
+            </a:schemeClr>
+          </a:lnRef>
+          <a:fillRef idx="1">
+            <a:schemeClr val="accent1"/>
+          </a:fillRef>
+          <a:effectRef idx="0">
+            <a:schemeClr val="accent1"/>
+          </a:effectRef>
+          <a:fontRef idx="minor">
+            <a:schemeClr val="lt1"/>
+          </a:fontRef>
+        </p:style>
+        <p:txBody>
+          <a:bodyPr rtlCol="0" anchor="ctr"/>
+          <a:lstStyle/>
+          <a:p>
+            <a:pPr algn="ctr"/>
+            <a:r>
+              <a:rPr lang="sv-SE" sz="2400" b="1" dirty="0">
                 <a:solidFill>
                   <a:schemeClr val="tx1"/>
                 </a:solidFill>
               </a:rPr>
-              <a:t>()</a:t>
-            </a:r>
-          </a:p>
-          <a:p>
-            <a:r>
-              <a:rPr lang="sv-SE" sz="1200" dirty="0">
-                <a:solidFill>
-                  <a:schemeClr val="tx1"/>
-                </a:solidFill>
-              </a:rPr>
-              <a:t>    pipeline =Pipeline(</a:t>
-            </a:r>
-            <a:r>
-              <a:rPr lang="sv-SE" sz="1200" dirty="0" err="1">
-                <a:solidFill>
-                  <a:schemeClr val="tx1"/>
-                </a:solidFill>
-              </a:rPr>
-              <a:t>config</a:t>
-            </a:r>
-            <a:r>
-              <a:rPr lang="sv-SE" sz="1200" dirty="0">
-                <a:solidFill>
-                  <a:schemeClr val="tx1"/>
-                </a:solidFill>
-              </a:rPr>
-              <a:t>, </a:t>
-            </a:r>
-            <a:r>
-              <a:rPr lang="sv-SE" sz="1200" dirty="0" err="1">
-                <a:solidFill>
-                  <a:schemeClr val="tx1"/>
-                </a:solidFill>
-              </a:rPr>
-              <a:t>df</a:t>
-            </a:r>
-            <a:r>
-              <a:rPr lang="sv-SE" sz="1200" dirty="0">
-                <a:solidFill>
-                  <a:schemeClr val="tx1"/>
-                </a:solidFill>
-              </a:rPr>
-              <a:t>, </a:t>
-            </a:r>
-            <a:r>
-              <a:rPr lang="sv-SE" sz="1200" dirty="0" err="1">
-                <a:solidFill>
-                  <a:schemeClr val="tx1"/>
-                </a:solidFill>
-              </a:rPr>
-              <a:t>is_train</a:t>
-            </a:r>
-            <a:r>
-              <a:rPr lang="sv-SE" sz="1200" dirty="0">
-                <a:solidFill>
-                  <a:schemeClr val="tx1"/>
-                </a:solidFill>
-              </a:rPr>
-              <a:t>=</a:t>
-            </a:r>
-            <a:r>
-              <a:rPr lang="sv-SE" sz="1200" dirty="0" err="1">
-                <a:solidFill>
-                  <a:schemeClr val="tx1"/>
-                </a:solidFill>
-              </a:rPr>
-              <a:t>True</a:t>
-            </a:r>
-            <a:r>
-              <a:rPr lang="sv-SE" sz="1200" dirty="0">
-                <a:solidFill>
-                  <a:schemeClr val="tx1"/>
-                </a:solidFill>
-              </a:rPr>
-              <a:t>)</a:t>
-            </a:r>
-          </a:p>
-          <a:p>
-            <a:r>
-              <a:rPr lang="sv-SE" sz="1200" dirty="0">
-                <a:solidFill>
-                  <a:schemeClr val="tx1"/>
-                </a:solidFill>
-              </a:rPr>
-              <a:t>    </a:t>
-            </a:r>
-            <a:r>
-              <a:rPr lang="sv-SE" sz="1200" dirty="0" err="1">
-                <a:solidFill>
-                  <a:schemeClr val="tx1"/>
-                </a:solidFill>
-              </a:rPr>
-              <a:t>pipeline.train</a:t>
-            </a:r>
-            <a:r>
-              <a:rPr lang="sv-SE" sz="1200" dirty="0">
-                <a:solidFill>
-                  <a:schemeClr val="tx1"/>
-                </a:solidFill>
-              </a:rPr>
-              <a:t>()</a:t>
-            </a:r>
-          </a:p>
-          <a:p>
-            <a:endParaRPr lang="sv-SE" sz="1200" dirty="0">
-              <a:solidFill>
-                <a:schemeClr val="tx1"/>
-              </a:solidFill>
-            </a:endParaRPr>
-          </a:p>
-          <a:p>
-            <a:r>
-              <a:rPr lang="sv-SE" sz="1200" dirty="0">
-                <a:solidFill>
-                  <a:schemeClr val="tx1"/>
-                </a:solidFill>
-              </a:rPr>
-              <a:t>@</a:t>
-            </a:r>
-            <a:r>
-              <a:rPr lang="sv-SE" sz="1200" dirty="0" err="1">
-                <a:solidFill>
-                  <a:schemeClr val="tx1"/>
-                </a:solidFill>
-              </a:rPr>
-              <a:t>pandas_udf</a:t>
-            </a:r>
-            <a:endParaRPr lang="sv-SE" sz="1200" dirty="0">
-              <a:solidFill>
-                <a:schemeClr val="tx1"/>
-              </a:solidFill>
-            </a:endParaRPr>
-          </a:p>
-          <a:p>
-            <a:r>
-              <a:rPr lang="sv-SE" sz="1200" dirty="0" err="1">
-                <a:solidFill>
-                  <a:schemeClr val="tx1"/>
-                </a:solidFill>
-              </a:rPr>
-              <a:t>def</a:t>
-            </a:r>
-            <a:r>
-              <a:rPr lang="sv-SE" sz="1200" dirty="0">
-                <a:solidFill>
-                  <a:schemeClr val="tx1"/>
-                </a:solidFill>
-              </a:rPr>
-              <a:t> </a:t>
-            </a:r>
-            <a:r>
-              <a:rPr lang="sv-SE" sz="1200" dirty="0" err="1">
-                <a:solidFill>
-                  <a:schemeClr val="tx1"/>
-                </a:solidFill>
-              </a:rPr>
-              <a:t>predict</a:t>
-            </a:r>
-            <a:r>
-              <a:rPr lang="sv-SE" sz="1200" dirty="0">
-                <a:solidFill>
-                  <a:schemeClr val="tx1"/>
-                </a:solidFill>
-              </a:rPr>
-              <a:t>()</a:t>
-            </a:r>
-          </a:p>
-          <a:p>
-            <a:r>
-              <a:rPr lang="sv-SE" sz="1200" dirty="0">
-                <a:solidFill>
-                  <a:schemeClr val="tx1"/>
-                </a:solidFill>
-              </a:rPr>
-              <a:t>    pipeline =Pipeline(</a:t>
-            </a:r>
-            <a:r>
-              <a:rPr lang="sv-SE" sz="1200" dirty="0" err="1">
-                <a:solidFill>
-                  <a:schemeClr val="tx1"/>
-                </a:solidFill>
-              </a:rPr>
-              <a:t>config</a:t>
-            </a:r>
-            <a:r>
-              <a:rPr lang="sv-SE" sz="1200" dirty="0">
-                <a:solidFill>
-                  <a:schemeClr val="tx1"/>
-                </a:solidFill>
-              </a:rPr>
-              <a:t>, </a:t>
-            </a:r>
-            <a:r>
-              <a:rPr lang="sv-SE" sz="1200" dirty="0" err="1">
-                <a:solidFill>
-                  <a:schemeClr val="tx1"/>
-                </a:solidFill>
-              </a:rPr>
-              <a:t>df</a:t>
-            </a:r>
-            <a:r>
-              <a:rPr lang="sv-SE" sz="1200" dirty="0">
-                <a:solidFill>
-                  <a:schemeClr val="tx1"/>
-                </a:solidFill>
-              </a:rPr>
-              <a:t>, </a:t>
-            </a:r>
-            <a:r>
-              <a:rPr lang="sv-SE" sz="1200" dirty="0" err="1">
-                <a:solidFill>
-                  <a:schemeClr val="tx1"/>
-                </a:solidFill>
-              </a:rPr>
-              <a:t>is_train</a:t>
-            </a:r>
-            <a:r>
-              <a:rPr lang="sv-SE" sz="1200" dirty="0">
-                <a:solidFill>
-                  <a:schemeClr val="tx1"/>
-                </a:solidFill>
-              </a:rPr>
-              <a:t>=</a:t>
-            </a:r>
-            <a:r>
-              <a:rPr lang="sv-SE" sz="1200" dirty="0" err="1">
-                <a:solidFill>
-                  <a:schemeClr val="tx1"/>
-                </a:solidFill>
-              </a:rPr>
-              <a:t>False</a:t>
-            </a:r>
-            <a:r>
-              <a:rPr lang="sv-SE" sz="1200" dirty="0">
-                <a:solidFill>
-                  <a:schemeClr val="tx1"/>
-                </a:solidFill>
-              </a:rPr>
-              <a:t>)</a:t>
-            </a:r>
-          </a:p>
-          <a:p>
-            <a:r>
-              <a:rPr lang="sv-SE" sz="1200" dirty="0">
-                <a:solidFill>
-                  <a:schemeClr val="tx1"/>
-                </a:solidFill>
-              </a:rPr>
-              <a:t>    </a:t>
-            </a:r>
-            <a:r>
-              <a:rPr lang="sv-SE" sz="1200" dirty="0" err="1">
-                <a:solidFill>
-                  <a:schemeClr val="tx1"/>
-                </a:solidFill>
-              </a:rPr>
-              <a:t>pipeline.predict</a:t>
-            </a:r>
-            <a:r>
-              <a:rPr lang="sv-SE" sz="1200" dirty="0">
-                <a:solidFill>
-                  <a:schemeClr val="tx1"/>
-                </a:solidFill>
-              </a:rPr>
-              <a:t>()</a:t>
-            </a:r>
-          </a:p>
-          <a:p>
-            <a:endParaRPr lang="sv-SE" sz="1200" dirty="0">
-              <a:solidFill>
-                <a:schemeClr val="tx1"/>
-              </a:solidFill>
-            </a:endParaRPr>
+              <a:t>Spark Pandas UDF</a:t>
+            </a:r>
+          </a:p>
+        </p:txBody>
+      </p:sp>
+      <p:sp>
+        <p:nvSpPr>
+          <p:cNvPr id="23" name="Right Arrow 22">
+            <a:extLst>
+              <a:ext uri="{FF2B5EF4-FFF2-40B4-BE49-F238E27FC236}">
+                <a16:creationId xmlns:a16="http://schemas.microsoft.com/office/drawing/2014/main" id="{861B3876-8359-6544-85B0-A3BD0D31C83D}"/>
+              </a:ext>
+            </a:extLst>
+          </p:cNvPr>
+          <p:cNvSpPr/>
+          <p:nvPr/>
+        </p:nvSpPr>
+        <p:spPr>
+          <a:xfrm>
+            <a:off x="4050888" y="3443740"/>
+            <a:ext cx="727587" cy="447376"/>
+          </a:xfrm>
+          <a:prstGeom prst="rightArrow">
+            <a:avLst/>
+          </a:prstGeom>
+          <a:noFill/>
+          <a:ln w="28575">
+            <a:solidFill>
+              <a:schemeClr val="tx1"/>
+            </a:solidFill>
+          </a:ln>
+        </p:spPr>
+        <p:style>
+          <a:lnRef idx="2">
+            <a:schemeClr val="accent1">
+              <a:shade val="50000"/>
+            </a:schemeClr>
+          </a:lnRef>
+          <a:fillRef idx="1">
+            <a:schemeClr val="accent1"/>
+          </a:fillRef>
+          <a:effectRef idx="0">
+            <a:schemeClr val="accent1"/>
+          </a:effectRef>
+          <a:fontRef idx="minor">
+            <a:schemeClr val="lt1"/>
+          </a:fontRef>
+        </p:style>
+        <p:txBody>
+          <a:bodyPr rtlCol="0" anchor="ctr"/>
+          <a:lstStyle/>
+          <a:p>
+            <a:pPr algn="ctr"/>
+            <a:endParaRPr lang="sv-SE" dirty="0"/>
+          </a:p>
+        </p:txBody>
+      </p:sp>
+      <p:sp>
+        <p:nvSpPr>
+          <p:cNvPr id="24" name="Right Arrow 23">
+            <a:extLst>
+              <a:ext uri="{FF2B5EF4-FFF2-40B4-BE49-F238E27FC236}">
+                <a16:creationId xmlns:a16="http://schemas.microsoft.com/office/drawing/2014/main" id="{0EA0D952-31B4-D749-B160-D83D4570B441}"/>
+              </a:ext>
+            </a:extLst>
+          </p:cNvPr>
+          <p:cNvSpPr/>
+          <p:nvPr/>
+        </p:nvSpPr>
+        <p:spPr>
+          <a:xfrm>
+            <a:off x="7074303" y="3443740"/>
+            <a:ext cx="727587" cy="447376"/>
+          </a:xfrm>
+          <a:prstGeom prst="rightArrow">
+            <a:avLst/>
+          </a:prstGeom>
+          <a:noFill/>
+          <a:ln w="28575">
+            <a:solidFill>
+              <a:schemeClr val="tx1"/>
+            </a:solidFill>
+          </a:ln>
+        </p:spPr>
+        <p:style>
+          <a:lnRef idx="2">
+            <a:schemeClr val="accent1">
+              <a:shade val="50000"/>
+            </a:schemeClr>
+          </a:lnRef>
+          <a:fillRef idx="1">
+            <a:schemeClr val="accent1"/>
+          </a:fillRef>
+          <a:effectRef idx="0">
+            <a:schemeClr val="accent1"/>
+          </a:effectRef>
+          <a:fontRef idx="minor">
+            <a:schemeClr val="lt1"/>
+          </a:fontRef>
+        </p:style>
+        <p:txBody>
+          <a:bodyPr rtlCol="0" anchor="ctr"/>
+          <a:lstStyle/>
+          <a:p>
+            <a:pPr algn="ctr"/>
+            <a:endParaRPr lang="sv-SE" dirty="0"/>
+          </a:p>
+        </p:txBody>
+      </p:sp>
+      <p:sp>
+        <p:nvSpPr>
+          <p:cNvPr id="25" name="Oval 24">
+            <a:extLst>
+              <a:ext uri="{FF2B5EF4-FFF2-40B4-BE49-F238E27FC236}">
+                <a16:creationId xmlns:a16="http://schemas.microsoft.com/office/drawing/2014/main" id="{43AC7EF4-DAC5-5C49-B83B-AAE7E4A20796}"/>
+              </a:ext>
+            </a:extLst>
+          </p:cNvPr>
+          <p:cNvSpPr/>
+          <p:nvPr/>
+        </p:nvSpPr>
+        <p:spPr>
+          <a:xfrm>
+            <a:off x="9640530" y="4560934"/>
+            <a:ext cx="216309" cy="226142"/>
+          </a:xfrm>
+          <a:prstGeom prst="ellipse">
+            <a:avLst/>
+          </a:prstGeom>
+          <a:solidFill>
+            <a:schemeClr val="tx1"/>
+          </a:solidFill>
+        </p:spPr>
+        <p:style>
+          <a:lnRef idx="2">
+            <a:schemeClr val="accent1">
+              <a:shade val="50000"/>
+            </a:schemeClr>
+          </a:lnRef>
+          <a:fillRef idx="1">
+            <a:schemeClr val="accent1"/>
+          </a:fillRef>
+          <a:effectRef idx="0">
+            <a:schemeClr val="accent1"/>
+          </a:effectRef>
+          <a:fontRef idx="minor">
+            <a:schemeClr val="lt1"/>
+          </a:fontRef>
+        </p:style>
+        <p:txBody>
+          <a:bodyPr rtlCol="0" anchor="ctr"/>
+          <a:lstStyle/>
+          <a:p>
+            <a:pPr algn="ctr"/>
+            <a:endParaRPr lang="sv-SE" dirty="0"/>
+          </a:p>
+        </p:txBody>
+      </p:sp>
+      <p:sp>
+        <p:nvSpPr>
+          <p:cNvPr id="26" name="Oval 25">
+            <a:extLst>
+              <a:ext uri="{FF2B5EF4-FFF2-40B4-BE49-F238E27FC236}">
+                <a16:creationId xmlns:a16="http://schemas.microsoft.com/office/drawing/2014/main" id="{545C1336-3BB7-E94E-A834-611F808274BA}"/>
+              </a:ext>
+            </a:extLst>
+          </p:cNvPr>
+          <p:cNvSpPr/>
+          <p:nvPr/>
+        </p:nvSpPr>
+        <p:spPr>
+          <a:xfrm>
+            <a:off x="9640529" y="4932097"/>
+            <a:ext cx="216309" cy="226142"/>
+          </a:xfrm>
+          <a:prstGeom prst="ellipse">
+            <a:avLst/>
+          </a:prstGeom>
+          <a:solidFill>
+            <a:schemeClr val="tx1"/>
+          </a:solidFill>
+        </p:spPr>
+        <p:style>
+          <a:lnRef idx="2">
+            <a:schemeClr val="accent1">
+              <a:shade val="50000"/>
+            </a:schemeClr>
+          </a:lnRef>
+          <a:fillRef idx="1">
+            <a:schemeClr val="accent1"/>
+          </a:fillRef>
+          <a:effectRef idx="0">
+            <a:schemeClr val="accent1"/>
+          </a:effectRef>
+          <a:fontRef idx="minor">
+            <a:schemeClr val="lt1"/>
+          </a:fontRef>
+        </p:style>
+        <p:txBody>
+          <a:bodyPr rtlCol="0" anchor="ctr"/>
+          <a:lstStyle/>
+          <a:p>
+            <a:pPr algn="ctr"/>
+            <a:endParaRPr lang="sv-SE" dirty="0"/>
+          </a:p>
+        </p:txBody>
+      </p:sp>
+      <p:sp>
+        <p:nvSpPr>
+          <p:cNvPr id="27" name="Oval 26">
+            <a:extLst>
+              <a:ext uri="{FF2B5EF4-FFF2-40B4-BE49-F238E27FC236}">
+                <a16:creationId xmlns:a16="http://schemas.microsoft.com/office/drawing/2014/main" id="{99F52FCE-65E1-F94F-A50D-CF624F4BFDE3}"/>
+              </a:ext>
+            </a:extLst>
+          </p:cNvPr>
+          <p:cNvSpPr/>
+          <p:nvPr/>
+        </p:nvSpPr>
+        <p:spPr>
+          <a:xfrm>
+            <a:off x="9640528" y="5299579"/>
+            <a:ext cx="216309" cy="226142"/>
+          </a:xfrm>
+          <a:prstGeom prst="ellipse">
+            <a:avLst/>
+          </a:prstGeom>
+          <a:solidFill>
+            <a:schemeClr val="tx1"/>
+          </a:solidFill>
+        </p:spPr>
+        <p:style>
+          <a:lnRef idx="2">
+            <a:schemeClr val="accent1">
+              <a:shade val="50000"/>
+            </a:schemeClr>
+          </a:lnRef>
+          <a:fillRef idx="1">
+            <a:schemeClr val="accent1"/>
+          </a:fillRef>
+          <a:effectRef idx="0">
+            <a:schemeClr val="accent1"/>
+          </a:effectRef>
+          <a:fontRef idx="minor">
+            <a:schemeClr val="lt1"/>
+          </a:fontRef>
+        </p:style>
+        <p:txBody>
+          <a:bodyPr rtlCol="0" anchor="ctr"/>
+          <a:lstStyle/>
+          <a:p>
+            <a:pPr algn="ctr"/>
+            <a:endParaRPr lang="sv-SE" dirty="0"/>
+          </a:p>
+        </p:txBody>
+      </p:sp>
+      <p:sp>
+        <p:nvSpPr>
+          <p:cNvPr id="28" name="Rectangle 27">
+            <a:extLst>
+              <a:ext uri="{FF2B5EF4-FFF2-40B4-BE49-F238E27FC236}">
+                <a16:creationId xmlns:a16="http://schemas.microsoft.com/office/drawing/2014/main" id="{A6134C8E-2852-854D-9E76-668251AE0953}"/>
+              </a:ext>
+            </a:extLst>
+          </p:cNvPr>
+          <p:cNvSpPr/>
+          <p:nvPr/>
+        </p:nvSpPr>
+        <p:spPr>
+          <a:xfrm>
+            <a:off x="7929712" y="1353567"/>
+            <a:ext cx="1224115" cy="360218"/>
+          </a:xfrm>
+          <a:prstGeom prst="rect">
+            <a:avLst/>
+          </a:prstGeom>
+          <a:solidFill>
+            <a:srgbClr val="00B0F0"/>
+          </a:solidFill>
+          <a:ln>
+            <a:solidFill>
+              <a:schemeClr val="tx1"/>
+            </a:solidFill>
+          </a:ln>
+        </p:spPr>
+        <p:style>
+          <a:lnRef idx="2">
+            <a:schemeClr val="accent1">
+              <a:shade val="50000"/>
+            </a:schemeClr>
+          </a:lnRef>
+          <a:fillRef idx="1">
+            <a:schemeClr val="accent1"/>
+          </a:fillRef>
+          <a:effectRef idx="0">
+            <a:schemeClr val="accent1"/>
+          </a:effectRef>
+          <a:fontRef idx="minor">
+            <a:schemeClr val="lt1"/>
+          </a:fontRef>
+        </p:style>
+        <p:txBody>
+          <a:bodyPr rtlCol="0" anchor="ctr"/>
+          <a:lstStyle/>
+          <a:p>
+            <a:pPr algn="ctr"/>
+            <a:r>
+              <a:rPr lang="sv-SE" dirty="0"/>
+              <a:t>Thread 1</a:t>
+            </a:r>
+          </a:p>
+        </p:txBody>
+      </p:sp>
+      <p:sp>
+        <p:nvSpPr>
+          <p:cNvPr id="29" name="Rectangle 28">
+            <a:extLst>
+              <a:ext uri="{FF2B5EF4-FFF2-40B4-BE49-F238E27FC236}">
+                <a16:creationId xmlns:a16="http://schemas.microsoft.com/office/drawing/2014/main" id="{93D39E18-2A98-4143-B48D-7A9D8885FEEE}"/>
+              </a:ext>
+            </a:extLst>
+          </p:cNvPr>
+          <p:cNvSpPr/>
+          <p:nvPr/>
+        </p:nvSpPr>
+        <p:spPr>
+          <a:xfrm>
+            <a:off x="7929713" y="2423033"/>
+            <a:ext cx="1224115" cy="360218"/>
+          </a:xfrm>
+          <a:prstGeom prst="rect">
+            <a:avLst/>
+          </a:prstGeom>
+          <a:solidFill>
+            <a:srgbClr val="00B0F0"/>
+          </a:solidFill>
+          <a:ln>
+            <a:solidFill>
+              <a:schemeClr val="tx1"/>
+            </a:solidFill>
+          </a:ln>
+        </p:spPr>
+        <p:style>
+          <a:lnRef idx="2">
+            <a:schemeClr val="accent1">
+              <a:shade val="50000"/>
+            </a:schemeClr>
+          </a:lnRef>
+          <a:fillRef idx="1">
+            <a:schemeClr val="accent1"/>
+          </a:fillRef>
+          <a:effectRef idx="0">
+            <a:schemeClr val="accent1"/>
+          </a:effectRef>
+          <a:fontRef idx="minor">
+            <a:schemeClr val="lt1"/>
+          </a:fontRef>
+        </p:style>
+        <p:txBody>
+          <a:bodyPr rtlCol="0" anchor="ctr"/>
+          <a:lstStyle/>
+          <a:p>
+            <a:pPr algn="ctr"/>
+            <a:r>
+              <a:rPr lang="sv-SE" dirty="0"/>
+              <a:t>Thread 2</a:t>
+            </a:r>
+          </a:p>
+        </p:txBody>
+      </p:sp>
+      <p:sp>
+        <p:nvSpPr>
+          <p:cNvPr id="30" name="Rectangle 29">
+            <a:extLst>
+              <a:ext uri="{FF2B5EF4-FFF2-40B4-BE49-F238E27FC236}">
+                <a16:creationId xmlns:a16="http://schemas.microsoft.com/office/drawing/2014/main" id="{7C4DF7AA-447E-924A-97C0-54E087EDAC3B}"/>
+              </a:ext>
+            </a:extLst>
+          </p:cNvPr>
+          <p:cNvSpPr/>
+          <p:nvPr/>
+        </p:nvSpPr>
+        <p:spPr>
+          <a:xfrm>
+            <a:off x="7929714" y="3489120"/>
+            <a:ext cx="1224115" cy="360218"/>
+          </a:xfrm>
+          <a:prstGeom prst="rect">
+            <a:avLst/>
+          </a:prstGeom>
+          <a:solidFill>
+            <a:srgbClr val="00B0F0"/>
+          </a:solidFill>
+          <a:ln>
+            <a:solidFill>
+              <a:schemeClr val="tx1"/>
+            </a:solidFill>
+          </a:ln>
+        </p:spPr>
+        <p:style>
+          <a:lnRef idx="2">
+            <a:schemeClr val="accent1">
+              <a:shade val="50000"/>
+            </a:schemeClr>
+          </a:lnRef>
+          <a:fillRef idx="1">
+            <a:schemeClr val="accent1"/>
+          </a:fillRef>
+          <a:effectRef idx="0">
+            <a:schemeClr val="accent1"/>
+          </a:effectRef>
+          <a:fontRef idx="minor">
+            <a:schemeClr val="lt1"/>
+          </a:fontRef>
+        </p:style>
+        <p:txBody>
+          <a:bodyPr rtlCol="0" anchor="ctr"/>
+          <a:lstStyle/>
+          <a:p>
+            <a:pPr algn="ctr"/>
+            <a:r>
+              <a:rPr lang="sv-SE" dirty="0"/>
+              <a:t>Thread 3</a:t>
+            </a:r>
+          </a:p>
+        </p:txBody>
+      </p:sp>
+      <p:sp>
+        <p:nvSpPr>
+          <p:cNvPr id="31" name="Rectangle 30">
+            <a:extLst>
+              <a:ext uri="{FF2B5EF4-FFF2-40B4-BE49-F238E27FC236}">
+                <a16:creationId xmlns:a16="http://schemas.microsoft.com/office/drawing/2014/main" id="{F55D91BC-9F0D-014E-9001-200F747E5C4A}"/>
+              </a:ext>
+            </a:extLst>
+          </p:cNvPr>
+          <p:cNvSpPr/>
+          <p:nvPr/>
+        </p:nvSpPr>
+        <p:spPr>
+          <a:xfrm>
+            <a:off x="7929711" y="5290974"/>
+            <a:ext cx="1224115" cy="360218"/>
+          </a:xfrm>
+          <a:prstGeom prst="rect">
+            <a:avLst/>
+          </a:prstGeom>
+          <a:solidFill>
+            <a:srgbClr val="00B0F0"/>
+          </a:solidFill>
+          <a:ln>
+            <a:solidFill>
+              <a:schemeClr val="tx1"/>
+            </a:solidFill>
+          </a:ln>
+        </p:spPr>
+        <p:style>
+          <a:lnRef idx="2">
+            <a:schemeClr val="accent1">
+              <a:shade val="50000"/>
+            </a:schemeClr>
+          </a:lnRef>
+          <a:fillRef idx="1">
+            <a:schemeClr val="accent1"/>
+          </a:fillRef>
+          <a:effectRef idx="0">
+            <a:schemeClr val="accent1"/>
+          </a:effectRef>
+          <a:fontRef idx="minor">
+            <a:schemeClr val="lt1"/>
+          </a:fontRef>
+        </p:style>
+        <p:txBody>
+          <a:bodyPr rtlCol="0" anchor="ctr"/>
+          <a:lstStyle/>
+          <a:p>
+            <a:pPr algn="ctr"/>
+            <a:r>
+              <a:rPr lang="sv-SE" dirty="0"/>
+              <a:t>Thread n</a:t>
+            </a:r>
+          </a:p>
+        </p:txBody>
+      </p:sp>
+      <p:sp>
+        <p:nvSpPr>
+          <p:cNvPr id="32" name="TextBox 31">
+            <a:extLst>
+              <a:ext uri="{FF2B5EF4-FFF2-40B4-BE49-F238E27FC236}">
+                <a16:creationId xmlns:a16="http://schemas.microsoft.com/office/drawing/2014/main" id="{5D6A45FB-3D18-1A48-92A8-D968BA737BA5}"/>
+              </a:ext>
+            </a:extLst>
+          </p:cNvPr>
+          <p:cNvSpPr txBox="1"/>
+          <p:nvPr/>
+        </p:nvSpPr>
+        <p:spPr>
+          <a:xfrm>
+            <a:off x="8217480" y="196702"/>
+            <a:ext cx="3021468" cy="646331"/>
+          </a:xfrm>
+          <a:prstGeom prst="rect">
+            <a:avLst/>
+          </a:prstGeom>
+          <a:noFill/>
+        </p:spPr>
+        <p:txBody>
+          <a:bodyPr wrap="none" rtlCol="0">
+            <a:spAutoFit/>
+          </a:bodyPr>
+          <a:lstStyle/>
+          <a:p>
+            <a:r>
+              <a:rPr lang="sv-SE" sz="3600" b="1" dirty="0"/>
+              <a:t>Model training</a:t>
+            </a:r>
+          </a:p>
+        </p:txBody>
+      </p:sp>
+      <p:sp>
+        <p:nvSpPr>
+          <p:cNvPr id="33" name="Rectangle 32">
+            <a:extLst>
+              <a:ext uri="{FF2B5EF4-FFF2-40B4-BE49-F238E27FC236}">
+                <a16:creationId xmlns:a16="http://schemas.microsoft.com/office/drawing/2014/main" id="{6BFECFD5-A20E-4848-8440-EA70D4694856}"/>
+              </a:ext>
+            </a:extLst>
+          </p:cNvPr>
+          <p:cNvSpPr/>
+          <p:nvPr/>
+        </p:nvSpPr>
+        <p:spPr>
+          <a:xfrm>
+            <a:off x="388375" y="1752606"/>
+            <a:ext cx="3588774" cy="3546974"/>
+          </a:xfrm>
+          <a:prstGeom prst="rect">
+            <a:avLst/>
+          </a:prstGeom>
+          <a:noFill/>
+          <a:ln w="76200">
+            <a:solidFill>
+              <a:schemeClr val="tx1"/>
+            </a:solidFill>
+          </a:ln>
+        </p:spPr>
+        <p:style>
+          <a:lnRef idx="2">
+            <a:schemeClr val="accent1">
+              <a:shade val="50000"/>
+            </a:schemeClr>
+          </a:lnRef>
+          <a:fillRef idx="1">
+            <a:schemeClr val="accent1"/>
+          </a:fillRef>
+          <a:effectRef idx="0">
+            <a:schemeClr val="accent1"/>
+          </a:effectRef>
+          <a:fontRef idx="minor">
+            <a:schemeClr val="lt1"/>
+          </a:fontRef>
+        </p:style>
+        <p:txBody>
+          <a:bodyPr rtlCol="0" anchor="ctr"/>
+          <a:lstStyle/>
+          <a:p>
+            <a:pPr algn="ctr"/>
+            <a:endParaRPr lang="sv-SE" sz="2800" dirty="0"/>
           </a:p>
         </p:txBody>
       </p:sp>
     </p:spTree>
     <p:extLst>
       <p:ext uri="{BB962C8B-B14F-4D97-AF65-F5344CB8AC3E}">
-        <p14:creationId xmlns:p14="http://schemas.microsoft.com/office/powerpoint/2010/main" val="2291919979"/>
+        <p14:creationId xmlns:p14="http://schemas.microsoft.com/office/powerpoint/2010/main" val="2569152220"/>
       </p:ext>
     </p:extLst>
   </p:cSld>
